--- a/code_search例会报告_509.pptx
+++ b/code_search例会报告_509.pptx
@@ -9478,36 +9478,14 @@
       </p:sp>
       <p:sp>
         <p:nvSpPr>
-          <p:cNvPr id="31" name="Rectangle 13"/>
-          <p:cNvSpPr/>
-          <p:nvPr/>
-        </p:nvSpPr>
-        <p:spPr>
-          <a:xfrm>
-            <a:off x="3733800" y="1524000"/>
-            <a:ext cx="4095750" cy="182245"/>
-          </a:xfrm>
-          <a:prstGeom prst="rect">
-            <a:avLst/>
-          </a:prstGeom>
-          <a:solidFill>
-            <a:srgbClr val="1F6FEB"/>
-          </a:solidFill>
-          <a:ln>
-            <a:noFill/>
-          </a:ln>
-        </p:spPr>
-      </p:sp>
-      <p:sp>
-        <p:nvSpPr>
           <p:cNvPr id="32" name="TextBox 14"/>
           <p:cNvSpPr txBox="1"/>
           <p:nvPr/>
         </p:nvSpPr>
         <p:spPr>
           <a:xfrm>
-            <a:off x="3971925" y="1252538"/>
-            <a:ext cx="3231547" cy="457200"/>
+            <a:off x="3803015" y="1245553"/>
+            <a:ext cx="4051300" cy="276860"/>
           </a:xfrm>
           <a:prstGeom prst="rect">
             <a:avLst/>
@@ -9524,7 +9502,7 @@
           <a:p>
             <a:pPr algn="l"/>
             <a:r>
-              <a:rPr lang="zh-CN" sz="2250" b="1" dirty="0">
+              <a:rPr lang="zh-CN" b="1" dirty="0">
                 <a:solidFill>
                   <a:srgbClr val="FFFFFF"/>
                 </a:solidFill>
@@ -9532,9 +9510,20 @@
                 <a:ea typeface="微软雅黑"/>
                 <a:cs typeface="Arial" panose="020B0604020202020204"/>
               </a:rPr>
-              <a:t>SemQL / Query DSL</a:t>
-            </a:r>
-            <a:endParaRPr lang="zh-CN" sz="2250" b="1" dirty="0">
+              <a:t>SemQL</a:t>
+            </a:r>
+            <a:r>
+              <a:rPr lang="en-US" altLang="zh-CN" b="1" dirty="0">
+                <a:solidFill>
+                  <a:srgbClr val="FFFFFF"/>
+                </a:solidFill>
+                <a:latin typeface="Arial" panose="020B0604020202020204"/>
+                <a:ea typeface="微软雅黑"/>
+                <a:cs typeface="Arial" panose="020B0604020202020204"/>
+              </a:rPr>
+              <a:t>-Driven Knowledge Extraction</a:t>
+            </a:r>
+            <a:endParaRPr lang="en-US" altLang="zh-CN" b="1" dirty="0">
               <a:solidFill>
                 <a:srgbClr val="FFFFFF"/>
               </a:solidFill>
@@ -9929,7 +9918,7 @@
         </p:nvSpPr>
         <p:spPr>
           <a:xfrm>
-            <a:off x="7981950" y="1809750"/>
+            <a:off x="8148320" y="1619250"/>
             <a:ext cx="742950" cy="571500"/>
           </a:xfrm>
           <a:custGeom>
@@ -11796,6 +11785,35 @@
               <a:ea typeface="微软雅黑"/>
               <a:cs typeface="Arial" panose="020B0604020202020204"/>
             </a:endParaRPr>
+          </a:p>
+        </p:txBody>
+      </p:sp>
+      <p:sp>
+        <p:nvSpPr>
+          <p:cNvPr id="2" name="文本框 1"/>
+          <p:cNvSpPr txBox="1"/>
+          <p:nvPr/>
+        </p:nvSpPr>
+        <p:spPr>
+          <a:xfrm>
+            <a:off x="2648585" y="1378585"/>
+            <a:ext cx="1085215" cy="368300"/>
+          </a:xfrm>
+          <a:prstGeom prst="rect">
+            <a:avLst/>
+          </a:prstGeom>
+          <a:noFill/>
+        </p:spPr>
+        <p:txBody>
+          <a:bodyPr wrap="square" rtlCol="0">
+            <a:spAutoFit/>
+          </a:bodyPr>
+          <a:p>
+            <a:r>
+              <a:rPr lang="en-US" altLang="zh-CN"/>
+              <a:t>LLM</a:t>
+            </a:r>
+            <a:endParaRPr lang="en-US" altLang="zh-CN"/>
           </a:p>
         </p:txBody>
       </p:sp>
@@ -13496,7 +13514,7 @@
         <p:spPr>
           <a:xfrm>
             <a:off x="571500" y="304800"/>
-            <a:ext cx="6122035" cy="461645"/>
+            <a:ext cx="8028940" cy="461645"/>
           </a:xfrm>
           <a:prstGeom prst="rect">
             <a:avLst/>
@@ -13522,10 +13540,10 @@
                 <a:ea typeface="微软雅黑"/>
                 <a:cs typeface="Arial" panose="020B0604020202020204"/>
               </a:rPr>
-              <a:t>Step1: DSL-Driven </a:t>
-            </a:r>
-            <a:r>
-              <a:rPr lang="en-US" altLang="zh-CN" sz="3000" b="1" dirty="0">
+              <a:t>Step1: </a:t>
+            </a:r>
+            <a:r>
+              <a:rPr lang="en-US" sz="3000" b="1" dirty="0">
                 <a:solidFill>
                   <a:srgbClr val="0B1F3A"/>
                 </a:solidFill>
@@ -13533,20 +13551,9 @@
                 <a:ea typeface="微软雅黑"/>
                 <a:cs typeface="Arial" panose="020B0604020202020204"/>
               </a:rPr>
-              <a:t>Info</a:t>
-            </a:r>
-            <a:r>
-              <a:rPr lang="zh-CN" sz="3000" b="1" dirty="0">
-                <a:solidFill>
-                  <a:srgbClr val="0B1F3A"/>
-                </a:solidFill>
-                <a:latin typeface="Arial" panose="020B0604020202020204"/>
-                <a:ea typeface="微软雅黑"/>
-                <a:cs typeface="Arial" panose="020B0604020202020204"/>
-              </a:rPr>
-              <a:t> Extraction</a:t>
-            </a:r>
-            <a:endParaRPr lang="zh-CN" sz="3000" b="1" dirty="0">
+              <a:t>SemQL-Driven Knowledge Extraction</a:t>
+            </a:r>
+            <a:endParaRPr lang="en-US" sz="3000" b="1" dirty="0">
               <a:solidFill>
                 <a:srgbClr val="0B1F3A"/>
               </a:solidFill>

--- a/code_search例会报告_509.pptx
+++ b/code_search例会报告_509.pptx
@@ -9045,7 +9045,7 @@
         <p:spPr>
           <a:xfrm>
             <a:off x="594360" y="689610"/>
-            <a:ext cx="5655310" cy="184150"/>
+            <a:ext cx="5198110" cy="184150"/>
           </a:xfrm>
           <a:prstGeom prst="rect">
             <a:avLst/>
@@ -9070,7 +9070,7 @@
                 <a:ea typeface="微软雅黑"/>
                 <a:cs typeface="Arial" panose="020B0604020202020204"/>
               </a:rPr>
-              <a:t>把自然语言整理成结构化、高信息量 schema；后续检索、过滤、重排按字段消费QL</a:t>
+              <a:t>把自然语言整理成结构化、高信息量 schema；后续检索、过滤、重排消费QL</a:t>
             </a:r>
             <a:endParaRPr lang="zh-CN" sz="1200" dirty="0">
               <a:solidFill>

--- a/code_search例会报告_509.pptx
+++ b/code_search例会报告_509.pptx
@@ -10594,7 +10594,7 @@
         </p:nvSpPr>
         <p:spPr>
           <a:xfrm>
-            <a:off x="1085850" y="4876800"/>
+            <a:off x="1186815" y="4876800"/>
             <a:ext cx="1004221" cy="304800"/>
           </a:xfrm>
           <a:prstGeom prst="rect">
